--- a/Slides/CSC6032/Advanced-OS-06-DFS.pptx
+++ b/Slides/CSC6032/Advanced-OS-06-DFS.pptx
@@ -305,7 +305,7 @@
             <a:fld id="{45BDCE37-E9BE-4280-8D68-34E43D66CEDB}" type="datetimeFigureOut">
               <a:rPr lang="zh-TW" altLang="en-US" smtClean="0"/>
               <a:pPr/>
-              <a:t>2026/7/29</a:t>
+              <a:t>2026/9/28</a:t>
             </a:fld>
             <a:endParaRPr lang="zh-TW" altLang="en-US"/>
           </a:p>
@@ -472,7 +472,7 @@
             <a:fld id="{FBFBA883-381C-409E-9635-BB54B21745E4}" type="datetimeFigureOut">
               <a:rPr lang="zh-TW" altLang="en-US" smtClean="0"/>
               <a:pPr/>
-              <a:t>2026/7/29</a:t>
+              <a:t>2026/9/28</a:t>
             </a:fld>
             <a:endParaRPr lang="zh-TW" altLang="en-US"/>
           </a:p>
@@ -8724,6 +8724,47 @@
                 <a:cs typeface="Times New Roman" panose="02020603050405020304" pitchFamily="18" charset="0"/>
               </a:rPr>
               <a:t> – Advanced Operating Systems</a:t>
+            </a:r>
+            <a:br>
+              <a:rPr lang="en-US" altLang="zh-TW" sz="3600" dirty="0">
+                <a:effectLst>
+                  <a:outerShdw blurRad="38100" dist="38100" dir="2700000" algn="tl">
+                    <a:srgbClr val="000000">
+                      <a:alpha val="43137"/>
+                    </a:srgbClr>
+                  </a:outerShdw>
+                </a:effectLst>
+                <a:latin typeface="Times New Roman" panose="02020603050405020304" pitchFamily="18" charset="0"/>
+                <a:cs typeface="Times New Roman" panose="02020603050405020304" pitchFamily="18" charset="0"/>
+              </a:rPr>
+            </a:br>
+            <a:r>
+              <a:rPr lang="en-US" altLang="zh-CN" sz="3600" dirty="0">
+                <a:effectLst>
+                  <a:outerShdw blurRad="38100" dist="38100" dir="2700000" algn="tl">
+                    <a:srgbClr val="000000">
+                      <a:alpha val="43137"/>
+                    </a:srgbClr>
+                  </a:outerShdw>
+                </a:effectLst>
+                <a:latin typeface="Times New Roman" panose="02020603050405020304" pitchFamily="18" charset="0"/>
+                <a:cs typeface="Times New Roman" panose="02020603050405020304" pitchFamily="18" charset="0"/>
+              </a:rPr>
+              <a:t>Distributed </a:t>
+            </a:r>
+            <a:r>
+              <a:rPr lang="en-US" altLang="zh-CN" sz="3600">
+                <a:effectLst>
+                  <a:outerShdw blurRad="38100" dist="38100" dir="2700000" algn="tl">
+                    <a:srgbClr val="000000">
+                      <a:alpha val="43137"/>
+                    </a:srgbClr>
+                  </a:outerShdw>
+                </a:effectLst>
+                <a:latin typeface="Times New Roman" panose="02020603050405020304" pitchFamily="18" charset="0"/>
+                <a:cs typeface="Times New Roman" panose="02020603050405020304" pitchFamily="18" charset="0"/>
+              </a:rPr>
+              <a:t>File Systems</a:t>
             </a:r>
             <a:endParaRPr lang="zh-TW" altLang="en-US" sz="3600" dirty="0">
               <a:effectLst>
